--- a/docs/deck/SIH26102-MPLADS-SIH-Idea.pptx
+++ b/docs/deck/SIH26102-MPLADS-SIH-Idea.pptx
@@ -6472,7 +6472,7 @@
                 </a:solidFill>
                 <a:latin typeface="Calibri"/>
               </a:rPr>
-              <a:t>2 minute walkthrough</a:t>
+              <a:t>2½ minute walkthrough</a:t>
             </a:r>
           </a:p>
         </p:txBody>
@@ -7642,7 +7642,7 @@
                 </a:solidFill>
                 <a:latin typeface="Calibri"/>
               </a:rPr>
-              <a:t>2 minute walkthrough</a:t>
+              <a:t>2½ minute walkthrough</a:t>
             </a:r>
           </a:p>
         </p:txBody>
@@ -8886,7 +8886,7 @@
                 </a:solidFill>
                 <a:latin typeface="Calibri"/>
               </a:rPr>
-              <a:t>2 minute walkthrough</a:t>
+              <a:t>2½ minute walkthrough</a:t>
             </a:r>
           </a:p>
         </p:txBody>
